--- a/teaching-pack/18-M14-exam-1-overweight-permit/M14-instructor-later-review.pptx
+++ b/teaching-pack/18-M14-exam-1-overweight-permit/M14-instructor-later-review.pptx
@@ -514,7 +514,7 @@
           </a:p>
           <a:p>
             <a:r>
-              <a:t>Clock resolution: setup before the timed block; 75 silent-writing minutes; collect after time. This follows the course and simulation plan and gives 5 more silent minutes than the PASS file's soft 'Exam block 70' label.</a:t>
+              <a:t>Clock lock: 75 writing minutes per the syllabus. Setup and collection are proctor overhead and are not subtracted from student writing time.</a:t>
             </a:r>
           </a:p>
           <a:p/>
@@ -595,7 +595,7 @@
           </a:p>
           <a:p>
             <a:r>
-              <a:t>Clock resolution: setup before the timed block; 75 silent-writing minutes; collect after time. This follows the course and simulation plan and gives 5 more silent minutes than the PASS file's soft 'Exam block 70' label.</a:t>
+              <a:t>Clock lock: 75 writing minutes per the syllabus. Setup and collection are proctor overhead and are not subtracted from student writing time.</a:t>
             </a:r>
           </a:p>
           <a:p/>
@@ -676,7 +676,7 @@
           </a:p>
           <a:p>
             <a:r>
-              <a:t>Clock resolution: setup before the timed block; 75 silent-writing minutes; collect after time. This follows the course and simulation plan and gives 5 more silent minutes than the PASS file's soft 'Exam block 70' label.</a:t>
+              <a:t>Clock lock: 75 writing minutes per the syllabus. Setup and collection are proctor overhead and are not subtracted from student writing time.</a:t>
             </a:r>
           </a:p>
           <a:p/>
@@ -757,7 +757,7 @@
           </a:p>
           <a:p>
             <a:r>
-              <a:t>Clock resolution: setup before the timed block; 75 silent-writing minutes; collect after time. This follows the course and simulation plan and gives 5 more silent minutes than the PASS file's soft 'Exam block 70' label.</a:t>
+              <a:t>Clock lock: 75 writing minutes per the syllabus. Setup and collection are proctor overhead and are not subtracted from student writing time.</a:t>
             </a:r>
           </a:p>
           <a:p/>
@@ -838,7 +838,7 @@
           </a:p>
           <a:p>
             <a:r>
-              <a:t>Clock resolution: setup before the timed block; 75 silent-writing minutes; collect after time. This follows the course and simulation plan and gives 5 more silent minutes than the PASS file's soft 'Exam block 70' label.</a:t>
+              <a:t>Clock lock: 75 writing minutes per the syllabus. Setup and collection are proctor overhead and are not subtracted from student writing time.</a:t>
             </a:r>
           </a:p>
           <a:p/>
@@ -919,7 +919,7 @@
           </a:p>
           <a:p>
             <a:r>
-              <a:t>Clock resolution: setup before the timed block; 75 silent-writing minutes; collect after time. This follows the course and simulation plan and gives 5 more silent minutes than the PASS file's soft 'Exam block 70' label.</a:t>
+              <a:t>Clock lock: 75 writing minutes per the syllabus. Setup and collection are proctor overhead and are not subtracted from student writing time.</a:t>
             </a:r>
           </a:p>
           <a:p/>
@@ -1000,7 +1000,7 @@
           </a:p>
           <a:p>
             <a:r>
-              <a:t>Clock resolution: setup before the timed block; 75 silent-writing minutes; collect after time. This follows the course and simulation plan and gives 5 more silent minutes than the PASS file's soft 'Exam block 70' label.</a:t>
+              <a:t>Clock lock: 75 writing minutes per the syllabus. Setup and collection are proctor overhead and are not subtracted from student writing time.</a:t>
             </a:r>
           </a:p>
           <a:p/>
@@ -1081,7 +1081,7 @@
           </a:p>
           <a:p>
             <a:r>
-              <a:t>Clock resolution: setup before the timed block; 75 silent-writing minutes; collect after time. This follows the course and simulation plan and gives 5 more silent minutes than the PASS file's soft 'Exam block 70' label.</a:t>
+              <a:t>Clock lock: 75 writing minutes per the syllabus. Setup and collection are proctor overhead and are not subtracted from student writing time.</a:t>
             </a:r>
           </a:p>
           <a:p/>
